--- a/pptx/dynamic_web_page_design_pptx.pptx
+++ b/pptx/dynamic_web_page_design_pptx.pptx
@@ -3817,6 +3817,185 @@
           </a:p>
         </p:txBody>
       </p:sp>
+      <p:sp>
+        <p:nvSpPr>
+          <p:cNvPr id="3" name="文字方塊 2">
+            <a:extLst>
+              <a:ext uri="{FF2B5EF4-FFF2-40B4-BE49-F238E27FC236}">
+                <a16:creationId xmlns:a16="http://schemas.microsoft.com/office/drawing/2014/main" id="{47D125A0-1999-1320-3F92-1A0A173694E1}"/>
+              </a:ext>
+            </a:extLst>
+          </p:cNvPr>
+          <p:cNvSpPr txBox="1"/>
+          <p:nvPr/>
+        </p:nvSpPr>
+        <p:spPr>
+          <a:xfrm>
+            <a:off x="6096000" y="3429000"/>
+            <a:ext cx="1505803" cy="369332"/>
+          </a:xfrm>
+          <a:prstGeom prst="rect">
+            <a:avLst/>
+          </a:prstGeom>
+          <a:noFill/>
+        </p:spPr>
+        <p:txBody>
+          <a:bodyPr wrap="square" rtlCol="0">
+            <a:spAutoFit/>
+          </a:bodyPr>
+          <a:lstStyle/>
+          <a:p>
+            <a:r>
+              <a:rPr lang="en-US" altLang="zh-TW" dirty="0" err="1"/>
+              <a:t>user_name</a:t>
+            </a:r>
+            <a:endParaRPr lang="zh-TW" altLang="en-US" dirty="0"/>
+          </a:p>
+        </p:txBody>
+      </p:sp>
+      <p:sp>
+        <p:nvSpPr>
+          <p:cNvPr id="6" name="文字方塊 5">
+            <a:extLst>
+              <a:ext uri="{FF2B5EF4-FFF2-40B4-BE49-F238E27FC236}">
+                <a16:creationId xmlns:a16="http://schemas.microsoft.com/office/drawing/2014/main" id="{F2484A51-43FA-8A10-10D2-26B7210E84AC}"/>
+              </a:ext>
+            </a:extLst>
+          </p:cNvPr>
+          <p:cNvSpPr txBox="1"/>
+          <p:nvPr/>
+        </p:nvSpPr>
+        <p:spPr>
+          <a:xfrm>
+            <a:off x="7891267" y="3438532"/>
+            <a:ext cx="1505803" cy="369332"/>
+          </a:xfrm>
+          <a:prstGeom prst="rect">
+            <a:avLst/>
+          </a:prstGeom>
+          <a:noFill/>
+        </p:spPr>
+        <p:txBody>
+          <a:bodyPr wrap="square" rtlCol="0">
+            <a:spAutoFit/>
+          </a:bodyPr>
+          <a:lstStyle/>
+          <a:p>
+            <a:r>
+              <a:rPr lang="en-US" altLang="zh-TW" dirty="0" err="1"/>
+              <a:t>pass_word</a:t>
+            </a:r>
+            <a:endParaRPr lang="zh-TW" altLang="en-US" dirty="0"/>
+          </a:p>
+        </p:txBody>
+      </p:sp>
+      <p:sp>
+        <p:nvSpPr>
+          <p:cNvPr id="10" name="文字方塊 9">
+            <a:extLst>
+              <a:ext uri="{FF2B5EF4-FFF2-40B4-BE49-F238E27FC236}">
+                <a16:creationId xmlns:a16="http://schemas.microsoft.com/office/drawing/2014/main" id="{F9E86263-B137-D54D-83A4-401D2B9D1DBB}"/>
+              </a:ext>
+            </a:extLst>
+          </p:cNvPr>
+          <p:cNvSpPr txBox="1"/>
+          <p:nvPr/>
+        </p:nvSpPr>
+        <p:spPr>
+          <a:xfrm>
+            <a:off x="6119591" y="4336624"/>
+            <a:ext cx="1795267" cy="369332"/>
+          </a:xfrm>
+          <a:prstGeom prst="rect">
+            <a:avLst/>
+          </a:prstGeom>
+          <a:noFill/>
+        </p:spPr>
+        <p:txBody>
+          <a:bodyPr wrap="square" rtlCol="0">
+            <a:spAutoFit/>
+          </a:bodyPr>
+          <a:lstStyle/>
+          <a:p>
+            <a:r>
+              <a:rPr lang="en-US" altLang="zh-TW" dirty="0" err="1"/>
+              <a:t>user_name_stats</a:t>
+            </a:r>
+            <a:endParaRPr lang="zh-TW" altLang="en-US" dirty="0"/>
+          </a:p>
+        </p:txBody>
+      </p:sp>
+      <p:sp>
+        <p:nvSpPr>
+          <p:cNvPr id="12" name="文字方塊 11">
+            <a:extLst>
+              <a:ext uri="{FF2B5EF4-FFF2-40B4-BE49-F238E27FC236}">
+                <a16:creationId xmlns:a16="http://schemas.microsoft.com/office/drawing/2014/main" id="{3B562FA1-60A3-FAED-91B6-EE6D22746553}"/>
+              </a:ext>
+            </a:extLst>
+          </p:cNvPr>
+          <p:cNvSpPr txBox="1"/>
+          <p:nvPr/>
+        </p:nvSpPr>
+        <p:spPr>
+          <a:xfrm>
+            <a:off x="7914858" y="4346156"/>
+            <a:ext cx="1734109" cy="369332"/>
+          </a:xfrm>
+          <a:prstGeom prst="rect">
+            <a:avLst/>
+          </a:prstGeom>
+          <a:noFill/>
+        </p:spPr>
+        <p:txBody>
+          <a:bodyPr wrap="square" rtlCol="0">
+            <a:spAutoFit/>
+          </a:bodyPr>
+          <a:lstStyle/>
+          <a:p>
+            <a:r>
+              <a:rPr lang="en-US" altLang="zh-TW" dirty="0" err="1"/>
+              <a:t>pass_word_stats</a:t>
+            </a:r>
+            <a:endParaRPr lang="zh-TW" altLang="en-US" dirty="0"/>
+          </a:p>
+        </p:txBody>
+      </p:sp>
+      <p:sp>
+        <p:nvSpPr>
+          <p:cNvPr id="13" name="文字方塊 12">
+            <a:extLst>
+              <a:ext uri="{FF2B5EF4-FFF2-40B4-BE49-F238E27FC236}">
+                <a16:creationId xmlns:a16="http://schemas.microsoft.com/office/drawing/2014/main" id="{30D97A50-C17C-C4C6-B43A-FE381E6A1C02}"/>
+              </a:ext>
+            </a:extLst>
+          </p:cNvPr>
+          <p:cNvSpPr txBox="1"/>
+          <p:nvPr/>
+        </p:nvSpPr>
+        <p:spPr>
+          <a:xfrm>
+            <a:off x="7147464" y="5244248"/>
+            <a:ext cx="1487606" cy="707886"/>
+          </a:xfrm>
+          <a:prstGeom prst="rect">
+            <a:avLst/>
+          </a:prstGeom>
+          <a:noFill/>
+        </p:spPr>
+        <p:txBody>
+          <a:bodyPr wrap="square" rtlCol="0">
+            <a:spAutoFit/>
+          </a:bodyPr>
+          <a:lstStyle/>
+          <a:p>
+            <a:r>
+              <a:rPr lang="zh-TW" altLang="en-US" sz="4000" dirty="0"/>
+              <a:t>欄位</a:t>
+            </a:r>
+          </a:p>
+        </p:txBody>
+      </p:sp>
     </p:spTree>
     <p:extLst>
       <p:ext uri="{BB962C8B-B14F-4D97-AF65-F5344CB8AC3E}">
@@ -4262,6 +4441,78 @@
           </a:p>
         </p:txBody>
       </p:sp>
+      <p:sp>
+        <p:nvSpPr>
+          <p:cNvPr id="5" name="文字方塊 4">
+            <a:extLst>
+              <a:ext uri="{FF2B5EF4-FFF2-40B4-BE49-F238E27FC236}">
+                <a16:creationId xmlns:a16="http://schemas.microsoft.com/office/drawing/2014/main" id="{FF1A207F-983C-EEBD-3539-0F0C9138773E}"/>
+              </a:ext>
+            </a:extLst>
+          </p:cNvPr>
+          <p:cNvSpPr txBox="1"/>
+          <p:nvPr/>
+        </p:nvSpPr>
+        <p:spPr>
+          <a:xfrm>
+            <a:off x="6178120" y="3578990"/>
+            <a:ext cx="1505803" cy="369332"/>
+          </a:xfrm>
+          <a:prstGeom prst="rect">
+            <a:avLst/>
+          </a:prstGeom>
+          <a:noFill/>
+        </p:spPr>
+        <p:txBody>
+          <a:bodyPr wrap="square" rtlCol="0">
+            <a:spAutoFit/>
+          </a:bodyPr>
+          <a:lstStyle/>
+          <a:p>
+            <a:r>
+              <a:rPr lang="en-US" altLang="zh-TW" dirty="0" err="1"/>
+              <a:t>user_name</a:t>
+            </a:r>
+            <a:endParaRPr lang="zh-TW" altLang="en-US" dirty="0"/>
+          </a:p>
+        </p:txBody>
+      </p:sp>
+      <p:sp>
+        <p:nvSpPr>
+          <p:cNvPr id="9" name="文字方塊 8">
+            <a:extLst>
+              <a:ext uri="{FF2B5EF4-FFF2-40B4-BE49-F238E27FC236}">
+                <a16:creationId xmlns:a16="http://schemas.microsoft.com/office/drawing/2014/main" id="{FA447179-2A75-B8BF-F2C7-B48BE3D33AC4}"/>
+              </a:ext>
+            </a:extLst>
+          </p:cNvPr>
+          <p:cNvSpPr txBox="1"/>
+          <p:nvPr/>
+        </p:nvSpPr>
+        <p:spPr>
+          <a:xfrm>
+            <a:off x="7973387" y="3588522"/>
+            <a:ext cx="1505803" cy="369332"/>
+          </a:xfrm>
+          <a:prstGeom prst="rect">
+            <a:avLst/>
+          </a:prstGeom>
+          <a:noFill/>
+        </p:spPr>
+        <p:txBody>
+          <a:bodyPr wrap="square" rtlCol="0">
+            <a:spAutoFit/>
+          </a:bodyPr>
+          <a:lstStyle/>
+          <a:p>
+            <a:r>
+              <a:rPr lang="en-US" altLang="zh-TW" dirty="0" err="1"/>
+              <a:t>pass_word</a:t>
+            </a:r>
+            <a:endParaRPr lang="zh-TW" altLang="en-US" dirty="0"/>
+          </a:p>
+        </p:txBody>
+      </p:sp>
     </p:spTree>
     <p:extLst>
       <p:ext uri="{BB962C8B-B14F-4D97-AF65-F5344CB8AC3E}">
@@ -4658,6 +4909,78 @@
           <a:lstStyle/>
           <a:p>
             <a:endParaRPr lang="zh-TW" altLang="en-US"/>
+          </a:p>
+        </p:txBody>
+      </p:sp>
+      <p:sp>
+        <p:nvSpPr>
+          <p:cNvPr id="3" name="文字方塊 2">
+            <a:extLst>
+              <a:ext uri="{FF2B5EF4-FFF2-40B4-BE49-F238E27FC236}">
+                <a16:creationId xmlns:a16="http://schemas.microsoft.com/office/drawing/2014/main" id="{F0D9AC21-59E6-6300-D751-07B990D866CF}"/>
+              </a:ext>
+            </a:extLst>
+          </p:cNvPr>
+          <p:cNvSpPr txBox="1"/>
+          <p:nvPr/>
+        </p:nvSpPr>
+        <p:spPr>
+          <a:xfrm>
+            <a:off x="5916727" y="2463845"/>
+            <a:ext cx="1795267" cy="369332"/>
+          </a:xfrm>
+          <a:prstGeom prst="rect">
+            <a:avLst/>
+          </a:prstGeom>
+          <a:noFill/>
+        </p:spPr>
+        <p:txBody>
+          <a:bodyPr wrap="square" rtlCol="0">
+            <a:spAutoFit/>
+          </a:bodyPr>
+          <a:lstStyle/>
+          <a:p>
+            <a:r>
+              <a:rPr lang="en-US" altLang="zh-TW" dirty="0" err="1"/>
+              <a:t>user_name_stats</a:t>
+            </a:r>
+            <a:endParaRPr lang="zh-TW" altLang="en-US" dirty="0"/>
+          </a:p>
+        </p:txBody>
+      </p:sp>
+      <p:sp>
+        <p:nvSpPr>
+          <p:cNvPr id="6" name="文字方塊 5">
+            <a:extLst>
+              <a:ext uri="{FF2B5EF4-FFF2-40B4-BE49-F238E27FC236}">
+                <a16:creationId xmlns:a16="http://schemas.microsoft.com/office/drawing/2014/main" id="{2DB31BE6-7B2C-CFFC-CE09-5F22F45D0026}"/>
+              </a:ext>
+            </a:extLst>
+          </p:cNvPr>
+          <p:cNvSpPr txBox="1"/>
+          <p:nvPr/>
+        </p:nvSpPr>
+        <p:spPr>
+          <a:xfrm>
+            <a:off x="7711994" y="2473377"/>
+            <a:ext cx="1734109" cy="369332"/>
+          </a:xfrm>
+          <a:prstGeom prst="rect">
+            <a:avLst/>
+          </a:prstGeom>
+          <a:noFill/>
+        </p:spPr>
+        <p:txBody>
+          <a:bodyPr wrap="square" rtlCol="0">
+            <a:spAutoFit/>
+          </a:bodyPr>
+          <a:lstStyle/>
+          <a:p>
+            <a:r>
+              <a:rPr lang="en-US" altLang="zh-TW" dirty="0" err="1"/>
+              <a:t>pass_word_stats</a:t>
+            </a:r>
+            <a:endParaRPr lang="zh-TW" altLang="en-US" dirty="0"/>
           </a:p>
         </p:txBody>
       </p:sp>
